--- a/classes/parte-7-red-team-y-operaciones-ofensivas/169-ofuscacion-de-payloads-y-bypass-de-amsi/clase-169-presentacion.pptx
+++ b/classes/parte-7-red-team-y-operaciones-ofensivas/169-ofuscacion-de-payloads-y-bypass-de-amsi/clase-169-presentacion.pptx
@@ -17,6 +17,9 @@
     <p:sldId id="265" r:id="rId16"/>
     <p:sldId id="266" r:id="rId17"/>
     <p:sldId id="267" r:id="rId18"/>
+    <p:sldId id="268" r:id="rId19"/>
+    <p:sldId id="269" r:id="rId20"/>
+    <p:sldId id="270" r:id="rId21"/>
   </p:sldIdLst>
   <p:sldSz cx="9144000" cy="6858000" type="screen4x3"/>
   <p:notesSz cx="6858000" cy="9144000"/>
@@ -3198,7 +3201,7 @@
                   <a:srgbClr val="0B3D2E"/>
                 </a:solidFill>
               </a:rPr>
-              <a:t>⚠️ Errores comunes</a:t>
+              <a:t>✍️ Ejercicios</a:t>
             </a:r>
           </a:p>
         </p:txBody>
@@ -3236,67 +3239,82 @@
                   <a:srgbClr val="22282E"/>
                 </a:solidFill>
               </a:rPr>
-              <a:t>•  El bypass público no funciona — Ya está firmado; entiende el mecanismo y adáptalo</a:t>
-            </a:r>
-          </a:p>
-          <a:p>
-            <a:pPr>
-              <a:spcAft>
-                <a:spcPts val="600"/>
-              </a:spcAft>
-            </a:pPr>
-            <a:r>
-              <a:rPr sz="1500">
-                <a:solidFill>
-                  <a:srgbClr val="22282E"/>
-                </a:solidFill>
-              </a:rPr>
-              <a:t>•  Ofusco pero AMSI sigue detectando — AMSI ve el runtime; la ofuscación estática no basta</a:t>
-            </a:r>
-          </a:p>
-          <a:p>
-            <a:pPr>
-              <a:spcAft>
-                <a:spcPts val="600"/>
-              </a:spcAft>
-            </a:pPr>
-            <a:r>
-              <a:rPr sz="1500">
-                <a:solidFill>
-                  <a:srgbClr val="22282E"/>
-                </a:solidFill>
-              </a:rPr>
-              <a:t>•  Downgrade falla — PS v2 deshabilitado (buen hardening); no hay atajo</a:t>
-            </a:r>
-          </a:p>
-          <a:p>
-            <a:pPr>
-              <a:spcAft>
-                <a:spcPts val="600"/>
-              </a:spcAft>
-            </a:pPr>
-            <a:r>
-              <a:rPr sz="1500">
-                <a:solidFill>
-                  <a:srgbClr val="22282E"/>
-                </a:solidFill>
-              </a:rPr>
-              <a:t>•  El patch bloquea PowerShell — Offset/versión incorrectos; verifica la firma de la función</a:t>
-            </a:r>
-          </a:p>
-          <a:p>
-            <a:pPr>
-              <a:spcAft>
-                <a:spcPts val="600"/>
-              </a:spcAft>
-            </a:pPr>
-            <a:r>
-              <a:rPr sz="1500">
-                <a:solidFill>
-                  <a:srgbClr val="22282E"/>
-                </a:solidFill>
-              </a:rPr>
-              <a:t>•  Script Block Logging te delata — Es telemetría rica; asume que el bypass es visible</a:t>
+              <a:t>•  Explica con tus palabras qué ventaja tiene AMSI sobre el escaneo de archivos en disco.</a:t>
+            </a:r>
+          </a:p>
+          <a:p>
+            <a:pPr>
+              <a:spcAft>
+                <a:spcPts val="600"/>
+              </a:spcAft>
+            </a:pPr>
+            <a:r>
+              <a:rPr sz="1500">
+                <a:solidFill>
+                  <a:srgbClr val="22282E"/>
+                </a:solidFill>
+              </a:rPr>
+              <a:t>•  Ofusca un script de prueba y evalúa si evade la firma estática.</a:t>
+            </a:r>
+          </a:p>
+          <a:p>
+            <a:pPr>
+              <a:spcAft>
+                <a:spcPts val="600"/>
+              </a:spcAft>
+            </a:pPr>
+            <a:r>
+              <a:rPr sz="1500">
+                <a:solidFill>
+                  <a:srgbClr val="22282E"/>
+                </a:solidFill>
+              </a:rPr>
+              <a:t>•  Describe paso a paso la lógica de un AMSI memory patch.</a:t>
+            </a:r>
+          </a:p>
+          <a:p>
+            <a:pPr>
+              <a:spcAft>
+                <a:spcPts val="600"/>
+              </a:spcAft>
+            </a:pPr>
+            <a:r>
+              <a:rPr sz="1500">
+                <a:solidFill>
+                  <a:srgbClr val="22282E"/>
+                </a:solidFill>
+              </a:rPr>
+              <a:t>•  Explica por qué el downgrade a PS v2 evade AMSI y cómo mitigarlo.</a:t>
+            </a:r>
+          </a:p>
+          <a:p>
+            <a:pPr>
+              <a:spcAft>
+                <a:spcPts val="600"/>
+              </a:spcAft>
+            </a:pPr>
+            <a:r>
+              <a:rPr sz="1500">
+                <a:solidFill>
+                  <a:srgbClr val="22282E"/>
+                </a:solidFill>
+              </a:rPr>
+              <a:t>•  Enumera 4 IOCs que deja un intento de bypass en los logs.</a:t>
+            </a:r>
+          </a:p>
+          <a:p>
+            <a:pPr>
+              <a:spcAft>
+                <a:spcPts val="600"/>
+              </a:spcAft>
+            </a:pPr>
+            <a:r>
+              <a:rPr sz="1500">
+                <a:solidFill>
+                  <a:srgbClr val="22282E"/>
+                </a:solidFill>
+              </a:rPr>
+              <a:t>•  Investiga por qué los bypass públicos "caducan" rápido.</a:t>
             </a:r>
           </a:p>
         </p:txBody>
@@ -3347,7 +3365,7 @@
                   <a:srgbClr val="0B3D2E"/>
                 </a:solidFill>
               </a:rPr>
-              <a:t>❓ Preguntas frecuentes</a:t>
+              <a:t>📝 Reto verificable</a:t>
             </a:r>
           </a:p>
         </p:txBody>
@@ -3385,82 +3403,22 @@
                   <a:srgbClr val="22282E"/>
                 </a:solidFill>
               </a:rPr>
-              <a:t>•  ❓ ¿Ofuscar es suficiente para evadir AMSI?</a:t>
-            </a:r>
-          </a:p>
-          <a:p>
-            <a:pPr>
-              <a:spcAft>
-                <a:spcPts val="600"/>
-              </a:spcAft>
-            </a:pPr>
-            <a:r>
-              <a:rPr sz="1500">
-                <a:solidFill>
-                  <a:srgbClr val="22282E"/>
-                </a:solidFill>
-              </a:rPr>
-              <a:t>•  No. AMSI inspecciona el contenido en memoria tras la desofuscación superficial, así que la ofuscación estática por sí sola raramente basta contra motores actualizados.</a:t>
-            </a:r>
-          </a:p>
-          <a:p>
-            <a:pPr>
-              <a:spcAft>
-                <a:spcPts val="600"/>
-              </a:spcAft>
-            </a:pPr>
-            <a:r>
-              <a:rPr sz="1500">
-                <a:solidFill>
-                  <a:srgbClr val="22282E"/>
-                </a:solidFill>
-              </a:rPr>
-              <a:t>•  ❓ ¿Por qué los bypass de GitHub dejan de funcionar?</a:t>
-            </a:r>
-          </a:p>
-          <a:p>
-            <a:pPr>
-              <a:spcAft>
-                <a:spcPts val="600"/>
-              </a:spcAft>
-            </a:pPr>
-            <a:r>
-              <a:rPr sz="1500">
-                <a:solidFill>
-                  <a:srgbClr val="22282E"/>
-                </a:solidFill>
-              </a:rPr>
-              <a:t>•  Porque en cuanto se publican, Microsoft los firma. La comprensión del mecanismo es lo duradero; el snippet concreto, no.</a:t>
-            </a:r>
-          </a:p>
-          <a:p>
-            <a:pPr>
-              <a:spcAft>
-                <a:spcPts val="600"/>
-              </a:spcAft>
-            </a:pPr>
-            <a:r>
-              <a:rPr sz="1500">
-                <a:solidFill>
-                  <a:srgbClr val="22282E"/>
-                </a:solidFill>
-              </a:rPr>
-              <a:t>•  ❓ ¿Deshabilitar AMSI es lo mismo que evadirlo?</a:t>
-            </a:r>
-          </a:p>
-          <a:p>
-            <a:pPr>
-              <a:spcAft>
-                <a:spcPts val="600"/>
-              </a:spcAft>
-            </a:pPr>
-            <a:r>
-              <a:rPr sz="1500">
-                <a:solidFill>
-                  <a:srgbClr val="22282E"/>
-                </a:solidFill>
-              </a:rPr>
-              <a:t>•  No exactamente: evadir es lograr que no bloquee tu contenido concreto; los memory patches efectivamente lo neutralizan en el proceso, lo cual es muy detectable.</a:t>
+              <a:t>•  En tu laboratorio, toma un script que Defender bloquea y consigue ejecutarlo aplicando una técnica de bypass de AMSI, documentando cómo el Blue Team lo detectaría.</a:t>
+            </a:r>
+          </a:p>
+          <a:p>
+            <a:pPr>
+              <a:spcAft>
+                <a:spcPts val="600"/>
+              </a:spcAft>
+            </a:pPr>
+            <a:r>
+              <a:rPr sz="1500">
+                <a:solidFill>
+                  <a:srgbClr val="22282E"/>
+                </a:solidFill>
+              </a:rPr>
+              <a:t>•  Criterio de aceptación: demuestras la ejecución del script tras el bypass (antes bloqueado) y entregas una regla o lista de indicadores (Script Block Logging, cadenas, comportamiento) con la que un…</a:t>
             </a:r>
           </a:p>
         </p:txBody>
@@ -3511,7 +3469,7 @@
                   <a:srgbClr val="0B3D2E"/>
                 </a:solidFill>
               </a:rPr>
-              <a:t>🔗 Referencias</a:t>
+              <a:t>⚠️ Errores comunes</a:t>
             </a:r>
           </a:p>
         </p:txBody>
@@ -3549,56 +3507,459 @@
                   <a:srgbClr val="22282E"/>
                 </a:solidFill>
               </a:rPr>
-              <a:t>•  Microsoft — Antimalware Scan Interface (AMSI). &lt;https://learn.microsoft.com/windows/win32/amsi/&gt;</a:t>
-            </a:r>
-          </a:p>
-          <a:p>
-            <a:pPr>
-              <a:spcAft>
-                <a:spcPts val="600"/>
-              </a:spcAft>
-            </a:pPr>
-            <a:r>
-              <a:rPr sz="1500">
-                <a:solidFill>
-                  <a:srgbClr val="22282E"/>
-                </a:solidFill>
-              </a:rPr>
-              <a:t>•  MITRE ATT&amp;CK — Impair Defenses (T1562). &lt;https://attack.mitre.org/techniques/T1562/&gt;</a:t>
-            </a:r>
-          </a:p>
-          <a:p>
-            <a:pPr>
-              <a:spcAft>
-                <a:spcPts val="600"/>
-              </a:spcAft>
-            </a:pPr>
-            <a:r>
-              <a:rPr sz="1500">
-                <a:solidFill>
-                  <a:srgbClr val="22282E"/>
-                </a:solidFill>
-              </a:rPr>
-              <a:t>•  Red Canary / research sobre detección de AMSI bypass.</a:t>
-            </a:r>
-          </a:p>
-          <a:p>
-            <a:pPr>
-              <a:spcAft>
-                <a:spcPts val="600"/>
-              </a:spcAft>
-            </a:pPr>
-            <a:r>
-              <a:rPr sz="1500">
-                <a:solidFill>
-                  <a:srgbClr val="22282E"/>
-                </a:solidFill>
-              </a:rPr>
-              <a:t>•  Clark, B. — RTFM: Red Team Field Manual v2.</a:t>
-            </a:r>
-          </a:p>
-        </p:txBody>
-      </p:sp>
+              <a:t>•  El bypass público no funciona — Ya está firmado; entiende el mecanismo y adáptalo</a:t>
+            </a:r>
+          </a:p>
+          <a:p>
+            <a:pPr>
+              <a:spcAft>
+                <a:spcPts val="600"/>
+              </a:spcAft>
+            </a:pPr>
+            <a:r>
+              <a:rPr sz="1500">
+                <a:solidFill>
+                  <a:srgbClr val="22282E"/>
+                </a:solidFill>
+              </a:rPr>
+              <a:t>•  Ofusco pero AMSI sigue detectando — AMSI ve el runtime; la ofuscación estática no basta</a:t>
+            </a:r>
+          </a:p>
+          <a:p>
+            <a:pPr>
+              <a:spcAft>
+                <a:spcPts val="600"/>
+              </a:spcAft>
+            </a:pPr>
+            <a:r>
+              <a:rPr sz="1500">
+                <a:solidFill>
+                  <a:srgbClr val="22282E"/>
+                </a:solidFill>
+              </a:rPr>
+              <a:t>•  Downgrade falla — PS v2 deshabilitado (buen hardening); no hay atajo</a:t>
+            </a:r>
+          </a:p>
+          <a:p>
+            <a:pPr>
+              <a:spcAft>
+                <a:spcPts val="600"/>
+              </a:spcAft>
+            </a:pPr>
+            <a:r>
+              <a:rPr sz="1500">
+                <a:solidFill>
+                  <a:srgbClr val="22282E"/>
+                </a:solidFill>
+              </a:rPr>
+              <a:t>•  El patch bloquea PowerShell — Offset/versión incorrectos; verifica la firma de la función</a:t>
+            </a:r>
+          </a:p>
+          <a:p>
+            <a:pPr>
+              <a:spcAft>
+                <a:spcPts val="600"/>
+              </a:spcAft>
+            </a:pPr>
+            <a:r>
+              <a:rPr sz="1500">
+                <a:solidFill>
+                  <a:srgbClr val="22282E"/>
+                </a:solidFill>
+              </a:rPr>
+              <a:t>•  Script Block Logging te delata — Es telemetría rica; asume que el bypass es visible</a:t>
+            </a:r>
+          </a:p>
+        </p:txBody>
+      </p:sp>
+    </p:spTree>
+  </p:cSld>
+  <p:clrMapOvr>
+    <a:masterClrMapping/>
+  </p:clrMapOvr>
+</p:sld>
+</file>
+
+<file path=ppt/slides/slide13.xml><?xml version="1.0" encoding="utf-8"?>
+<p:sld xmlns:a="http://schemas.openxmlformats.org/drawingml/2006/main" xmlns:p="http://schemas.openxmlformats.org/presentationml/2006/main" xmlns:r="http://schemas.openxmlformats.org/officeDocument/2006/relationships">
+  <p:cSld>
+    <p:spTree>
+      <p:nvGrpSpPr>
+        <p:cNvPr id="1" name=""/>
+        <p:cNvGrpSpPr/>
+        <p:nvPr/>
+      </p:nvGrpSpPr>
+      <p:grpSpPr/>
+      <p:sp>
+        <p:nvSpPr>
+          <p:cNvPr id="2" name="TextBox 1"/>
+          <p:cNvSpPr txBox="1"/>
+          <p:nvPr/>
+        </p:nvSpPr>
+        <p:spPr>
+          <a:xfrm>
+            <a:off x="457200" y="320040"/>
+            <a:ext cx="8229600" cy="822960"/>
+          </a:xfrm>
+          <a:prstGeom prst="rect">
+            <a:avLst/>
+          </a:prstGeom>
+          <a:noFill/>
+        </p:spPr>
+        <p:txBody>
+          <a:bodyPr wrap="square">
+            <a:spAutoFit/>
+          </a:bodyPr>
+          <a:lstStyle/>
+          <a:p>
+            <a:r>
+              <a:rPr sz="2600" b="1">
+                <a:solidFill>
+                  <a:srgbClr val="0B3D2E"/>
+                </a:solidFill>
+              </a:rPr>
+              <a:t>❓ Preguntas frecuentes</a:t>
+            </a:r>
+          </a:p>
+        </p:txBody>
+      </p:sp>
+      <p:sp>
+        <p:nvSpPr>
+          <p:cNvPr id="3" name="TextBox 2"/>
+          <p:cNvSpPr txBox="1"/>
+          <p:nvPr/>
+        </p:nvSpPr>
+        <p:spPr>
+          <a:xfrm>
+            <a:off x="457200" y="1280160"/>
+            <a:ext cx="8229600" cy="4937760"/>
+          </a:xfrm>
+          <a:prstGeom prst="rect">
+            <a:avLst/>
+          </a:prstGeom>
+          <a:noFill/>
+        </p:spPr>
+        <p:txBody>
+          <a:bodyPr wrap="square">
+            <a:spAutoFit/>
+          </a:bodyPr>
+          <a:lstStyle/>
+          <a:p>
+            <a:pPr>
+              <a:spcAft>
+                <a:spcPts val="600"/>
+              </a:spcAft>
+            </a:pPr>
+            <a:r>
+              <a:rPr sz="1500">
+                <a:solidFill>
+                  <a:srgbClr val="22282E"/>
+                </a:solidFill>
+              </a:rPr>
+              <a:t>•  ❓ ¿Ofuscar es suficiente para evadir AMSI?</a:t>
+            </a:r>
+          </a:p>
+          <a:p>
+            <a:pPr>
+              <a:spcAft>
+                <a:spcPts val="600"/>
+              </a:spcAft>
+            </a:pPr>
+            <a:r>
+              <a:rPr sz="1500">
+                <a:solidFill>
+                  <a:srgbClr val="22282E"/>
+                </a:solidFill>
+              </a:rPr>
+              <a:t>•  No. AMSI inspecciona el contenido en memoria tras la desofuscación superficial, así que la ofuscación estática por sí sola raramente basta contra motores actualizados.</a:t>
+            </a:r>
+          </a:p>
+          <a:p>
+            <a:pPr>
+              <a:spcAft>
+                <a:spcPts val="600"/>
+              </a:spcAft>
+            </a:pPr>
+            <a:r>
+              <a:rPr sz="1500">
+                <a:solidFill>
+                  <a:srgbClr val="22282E"/>
+                </a:solidFill>
+              </a:rPr>
+              <a:t>•  ❓ ¿Por qué los bypass de GitHub dejan de funcionar?</a:t>
+            </a:r>
+          </a:p>
+          <a:p>
+            <a:pPr>
+              <a:spcAft>
+                <a:spcPts val="600"/>
+              </a:spcAft>
+            </a:pPr>
+            <a:r>
+              <a:rPr sz="1500">
+                <a:solidFill>
+                  <a:srgbClr val="22282E"/>
+                </a:solidFill>
+              </a:rPr>
+              <a:t>•  Porque los proveedores pueden añadir firmas, heurísticas o detecciones de comportamiento, y las versiones del host cambian. La comprensión del mecanismo es duradera; el snippet concreto no.</a:t>
+            </a:r>
+          </a:p>
+          <a:p>
+            <a:pPr>
+              <a:spcAft>
+                <a:spcPts val="600"/>
+              </a:spcAft>
+            </a:pPr>
+            <a:r>
+              <a:rPr sz="1500">
+                <a:solidFill>
+                  <a:srgbClr val="22282E"/>
+                </a:solidFill>
+              </a:rPr>
+              <a:t>•  ❓ ¿Deshabilitar AMSI es lo mismo que evadirlo?</a:t>
+            </a:r>
+          </a:p>
+          <a:p>
+            <a:pPr>
+              <a:spcAft>
+                <a:spcPts val="600"/>
+              </a:spcAft>
+            </a:pPr>
+            <a:r>
+              <a:rPr sz="1500">
+                <a:solidFill>
+                  <a:srgbClr val="22282E"/>
+                </a:solidFill>
+              </a:rPr>
+              <a:t>•  No exactamente: evadir es lograr que no bloquee tu contenido concreto; los memory patches efectivamente lo neutralizan en el proceso, lo cual es muy detectable.</a:t>
+            </a:r>
+          </a:p>
+        </p:txBody>
+      </p:sp>
+    </p:spTree>
+  </p:cSld>
+  <p:clrMapOvr>
+    <a:masterClrMapping/>
+  </p:clrMapOvr>
+</p:sld>
+</file>
+
+<file path=ppt/slides/slide14.xml><?xml version="1.0" encoding="utf-8"?>
+<p:sld xmlns:a="http://schemas.openxmlformats.org/drawingml/2006/main" xmlns:p="http://schemas.openxmlformats.org/presentationml/2006/main" xmlns:r="http://schemas.openxmlformats.org/officeDocument/2006/relationships">
+  <p:cSld>
+    <p:spTree>
+      <p:nvGrpSpPr>
+        <p:cNvPr id="1" name=""/>
+        <p:cNvGrpSpPr/>
+        <p:nvPr/>
+      </p:nvGrpSpPr>
+      <p:grpSpPr/>
+      <p:sp>
+        <p:nvSpPr>
+          <p:cNvPr id="2" name="TextBox 1"/>
+          <p:cNvSpPr txBox="1"/>
+          <p:nvPr/>
+        </p:nvSpPr>
+        <p:spPr>
+          <a:xfrm>
+            <a:off x="457200" y="320040"/>
+            <a:ext cx="8229600" cy="822960"/>
+          </a:xfrm>
+          <a:prstGeom prst="rect">
+            <a:avLst/>
+          </a:prstGeom>
+          <a:noFill/>
+        </p:spPr>
+        <p:txBody>
+          <a:bodyPr wrap="square">
+            <a:spAutoFit/>
+          </a:bodyPr>
+          <a:lstStyle/>
+          <a:p>
+            <a:r>
+              <a:rPr sz="2600" b="1">
+                <a:solidFill>
+                  <a:srgbClr val="0B3D2E"/>
+                </a:solidFill>
+              </a:rPr>
+              <a:t>🔗 Referencias</a:t>
+            </a:r>
+          </a:p>
+        </p:txBody>
+      </p:sp>
+      <p:sp>
+        <p:nvSpPr>
+          <p:cNvPr id="3" name="TextBox 2"/>
+          <p:cNvSpPr txBox="1"/>
+          <p:nvPr/>
+        </p:nvSpPr>
+        <p:spPr>
+          <a:xfrm>
+            <a:off x="457200" y="1280160"/>
+            <a:ext cx="8229600" cy="4937760"/>
+          </a:xfrm>
+          <a:prstGeom prst="rect">
+            <a:avLst/>
+          </a:prstGeom>
+          <a:noFill/>
+        </p:spPr>
+        <p:txBody>
+          <a:bodyPr wrap="square">
+            <a:spAutoFit/>
+          </a:bodyPr>
+          <a:lstStyle/>
+          <a:p>
+            <a:pPr>
+              <a:spcAft>
+                <a:spcPts val="600"/>
+              </a:spcAft>
+            </a:pPr>
+            <a:r>
+              <a:rPr sz="1500">
+                <a:solidFill>
+                  <a:srgbClr val="22282E"/>
+                </a:solidFill>
+              </a:rPr>
+              <a:t>•  Microsoft — Antimalware Scan Interface (AMSI). &lt;https://learn.microsoft.com/en-us/windows/win32/amsi/antimalware-scan-interface-portal&gt; — fuente principal para el propósito, las integraciones, las…</a:t>
+            </a:r>
+          </a:p>
+          <a:p>
+            <a:pPr>
+              <a:spcAft>
+                <a:spcPts val="600"/>
+              </a:spcAft>
+            </a:pPr>
+            <a:r>
+              <a:rPr sz="1500">
+                <a:solidFill>
+                  <a:srgbClr val="22282E"/>
+                </a:solidFill>
+              </a:rPr>
+              <a:t>•  Microsoft — AMSI developer audience, samples. &lt;https://learn.microsoft.com/en-us/windows/win32/amsi/dev-audience&gt; — referencia del flujo de inicialización, análisis y resultado utilizado en el…</a:t>
+            </a:r>
+          </a:p>
+          <a:p>
+            <a:pPr>
+              <a:spcAft>
+                <a:spcPts val="600"/>
+              </a:spcAft>
+            </a:pPr>
+            <a:r>
+              <a:rPr sz="1500">
+                <a:solidFill>
+                  <a:srgbClr val="22282E"/>
+                </a:solidFill>
+              </a:rPr>
+              <a:t>•  MITRE ATT&amp;CK — Impair Defenses (T1562). &lt;https://attack.mitre.org/techniques/T1562/&gt; — clasificación de la degradación de controles y sus posibilidades de detección.</a:t>
+            </a:r>
+          </a:p>
+          <a:p>
+            <a:pPr>
+              <a:spcAft>
+                <a:spcPts val="600"/>
+              </a:spcAft>
+            </a:pPr>
+            <a:r>
+              <a:rPr sz="1500">
+                <a:solidFill>
+                  <a:srgbClr val="22282E"/>
+                </a:solidFill>
+              </a:rPr>
+              <a:t>•  Microsoft — about Logging Windows. &lt;https://learn.microsoft.com/en-us/powershell/module/microsoft.powershell.core/about/aboutloggingwindows&gt; — sustenta Script Block Logging como fuente de observación…</a:t>
+            </a:r>
+          </a:p>
+          <a:p>
+            <a:pPr>
+              <a:spcAft>
+                <a:spcPts val="600"/>
+              </a:spcAft>
+            </a:pPr>
+            <a:r>
+              <a:rPr sz="1500">
+                <a:solidFill>
+                  <a:srgbClr val="22282E"/>
+                </a:solidFill>
+              </a:rPr>
+              <a:t>•  Clark, B. — RTFM: Red Team Field Manual v2 — referencia de consulta operativa; el funcionamiento de AMSI se fundamenta en Microsoft Learn.</a:t>
+            </a:r>
+          </a:p>
+        </p:txBody>
+      </p:sp>
+    </p:spTree>
+  </p:cSld>
+  <p:clrMapOvr>
+    <a:masterClrMapping/>
+  </p:clrMapOvr>
+</p:sld>
+</file>
+
+<file path=ppt/slides/slide15.xml><?xml version="1.0" encoding="utf-8"?>
+<p:sld xmlns:a="http://schemas.openxmlformats.org/drawingml/2006/main" xmlns:p="http://schemas.openxmlformats.org/presentationml/2006/main" xmlns:r="http://schemas.openxmlformats.org/officeDocument/2006/relationships">
+  <p:cSld>
+    <p:spTree>
+      <p:nvGrpSpPr>
+        <p:cNvPr id="1" name=""/>
+        <p:cNvGrpSpPr/>
+        <p:nvPr/>
+      </p:nvGrpSpPr>
+      <p:grpSpPr/>
+      <p:sp>
+        <p:nvSpPr>
+          <p:cNvPr id="2" name="TextBox 1"/>
+          <p:cNvSpPr txBox="1"/>
+          <p:nvPr/>
+        </p:nvSpPr>
+        <p:spPr>
+          <a:xfrm>
+            <a:off x="457200" y="274320"/>
+            <a:ext cx="8229600" cy="640080"/>
+          </a:xfrm>
+          <a:prstGeom prst="rect">
+            <a:avLst/>
+          </a:prstGeom>
+          <a:noFill/>
+        </p:spPr>
+        <p:txBody>
+          <a:bodyPr wrap="square">
+            <a:spAutoFit/>
+          </a:bodyPr>
+          <a:lstStyle/>
+          <a:p>
+            <a:r>
+              <a:rPr sz="2200" b="1">
+                <a:solidFill>
+                  <a:srgbClr val="0B3D2E"/>
+                </a:solidFill>
+              </a:rPr>
+              <a:t>Diagrama de la clase</a:t>
+            </a:r>
+          </a:p>
+        </p:txBody>
+      </p:sp>
+      <p:pic>
+        <p:nvPicPr>
+          <p:cNvPr id="3" name="Picture 2" descr="54f02670a6f63af1.png"/>
+          <p:cNvPicPr>
+            <a:picLocks noChangeAspect="1"/>
+          </p:cNvPicPr>
+          <p:nvPr/>
+        </p:nvPicPr>
+        <p:blipFill>
+          <a:blip r:embed="rId2"/>
+          <a:stretch>
+            <a:fillRect/>
+          </a:stretch>
+        </p:blipFill>
+        <p:spPr>
+          <a:xfrm>
+            <a:off x="567664" y="1097280"/>
+            <a:ext cx="8008671" cy="5303520"/>
+          </a:xfrm>
+          <a:prstGeom prst="rect">
+            <a:avLst/>
+          </a:prstGeom>
+        </p:spPr>
+      </p:pic>
     </p:spTree>
   </p:cSld>
   <p:clrMapOvr>
@@ -3683,7 +4044,7 @@
                   <a:srgbClr val="22282E"/>
                 </a:solidFill>
               </a:rPr>
-              <a:t>•  Comprender AMSI (Antimalware Scan Interface) y las técnicas de ofuscación de payloads que lo evaden, entendiendo el mecanismo en profundidad. El alumno verá cómo AMSI inspecciona scripts en memoria (PowerShell, VBA, JScript), por qué la ofuscación simple ya no basta, y las estrategias de bypass responsables, con foco en cómo se detectan.</a:t>
+              <a:t>•  Comprender AMSI (Antimalware Scan Interface) y las técnicas de ofuscación de payloads que lo evaden, entendiendo el mecanismo en profundidad. El alumno verá cómo AMSI inspecciona scripts en memoria…</a:t>
             </a:r>
           </a:p>
         </p:txBody>
@@ -4077,7 +4438,7 @@
                   <a:srgbClr val="0B3D2E"/>
                 </a:solidFill>
               </a:rPr>
-              <a:t>📖 Definiciones y características</a:t>
+              <a:t>🧠 Explicación en profundidad</a:t>
             </a:r>
           </a:p>
         </p:txBody>
@@ -4115,82 +4476,97 @@
                   <a:srgbClr val="22282E"/>
                 </a:solidFill>
               </a:rPr>
-              <a:t>•  AMSI: interfaz de Windows que permite a los antivirus escanear contenido (scripts, macros) justo antes de ejecutarse. Característica: ve el código ya "desofuscado" en memoria.</a:t>
-            </a:r>
-          </a:p>
-          <a:p>
-            <a:pPr>
-              <a:spcAft>
-                <a:spcPts val="600"/>
-              </a:spcAft>
-            </a:pPr>
-            <a:r>
-              <a:rPr sz="1500">
-                <a:solidFill>
-                  <a:srgbClr val="22282E"/>
-                </a:solidFill>
-              </a:rPr>
-              <a:t>•  Ofuscación: transformar el código para romper firmas manteniendo la funcionalidad. Característica: derrota firmas, no comportamiento.</a:t>
-            </a:r>
-          </a:p>
-          <a:p>
-            <a:pPr>
-              <a:spcAft>
-                <a:spcPts val="600"/>
-              </a:spcAft>
-            </a:pPr>
-            <a:r>
-              <a:rPr sz="1500">
-                <a:solidFill>
-                  <a:srgbClr val="22282E"/>
-                </a:solidFill>
-              </a:rPr>
-              <a:t>•  AMSI bypass (memory patch): modificar en memoria la función que devuelve el resultado del scan (ej. AmsiScanBuffer) para que siempre diga "limpio". Característica: muy usado y muy detectado.</a:t>
-            </a:r>
-          </a:p>
-          <a:p>
-            <a:pPr>
-              <a:spcAft>
-                <a:spcPts val="600"/>
-              </a:spcAft>
-            </a:pPr>
-            <a:r>
-              <a:rPr sz="1500">
-                <a:solidFill>
-                  <a:srgbClr val="22282E"/>
-                </a:solidFill>
-              </a:rPr>
-              <a:t>•  Downgrade: forzar el uso de PowerShell v2 (sin AMSI). Característica: evita AMSI si la v2 está disponible.</a:t>
-            </a:r>
-          </a:p>
-          <a:p>
-            <a:pPr>
-              <a:spcAft>
-                <a:spcPts val="600"/>
-              </a:spcAft>
-            </a:pPr>
-            <a:r>
-              <a:rPr sz="1500">
-                <a:solidFill>
-                  <a:srgbClr val="22282E"/>
-                </a:solidFill>
-              </a:rPr>
-              <a:t>•  Provider tampering: manipular el proveedor de AMSI registrado. Característica: técnica más sigilosa pero compleja.</a:t>
-            </a:r>
-          </a:p>
-          <a:p>
-            <a:pPr>
-              <a:spcAft>
-                <a:spcPts val="600"/>
-              </a:spcAft>
-            </a:pPr>
-            <a:r>
-              <a:rPr sz="1500">
-                <a:solidFill>
-                  <a:srgbClr val="22282E"/>
-                </a:solidFill>
-              </a:rPr>
-              <a:t>•  String obfuscation / encoding: dividir y codificar cadenas sospechosas. Característica: primer nivel de evasión estática.</a:t>
+              <a:t>•  AMSI permite que una aplicación entregue contenido a un proveedor antimalware y reciba un resultado. Microsoft documenta integraciones en PowerShell, Windows Script Host, JavaScript/VBScript, macros…</a:t>
+            </a:r>
+          </a:p>
+          <a:p>
+            <a:pPr>
+              <a:spcAft>
+                <a:spcPts val="600"/>
+              </a:spcAft>
+            </a:pPr>
+            <a:r>
+              <a:rPr sz="1500">
+                <a:solidFill>
+                  <a:srgbClr val="22282E"/>
+                </a:solidFill>
+              </a:rPr>
+              <a:t>•  Su ventaja pedagógica aparece en el momento del análisis. Un script puede llegar codificado o dividido y, aun así, el host puede enviar al proveedor una representación más cercana al contenido que…</a:t>
+            </a:r>
+          </a:p>
+          <a:p>
+            <a:pPr>
+              <a:spcAft>
+                <a:spcPts val="600"/>
+              </a:spcAft>
+            </a:pPr>
+            <a:r>
+              <a:rPr sz="1500">
+                <a:solidFill>
+                  <a:srgbClr val="22282E"/>
+                </a:solidFill>
+              </a:rPr>
+              <a:t>•  La codificación cambia una representación para transportarla o interpretarla; Base64 no aporta secreto. El cifrado protege confidencialidad mientras exista una clave adecuada. La ofuscación busca…</a:t>
+            </a:r>
+          </a:p>
+          <a:p>
+            <a:pPr>
+              <a:spcAft>
+                <a:spcPts val="600"/>
+              </a:spcAft>
+            </a:pPr>
+            <a:r>
+              <a:rPr sz="1500">
+                <a:solidFill>
+                  <a:srgbClr val="22282E"/>
+                </a:solidFill>
+              </a:rPr>
+              <a:t>•  Evaluar ofuscación solo por si «pasa» una muestra confunde el resultado. Hay que comprobar legibilidad, contenido entregado a AMSI, Script Block Logging, proceso resultante y comportamiento. La…</a:t>
+            </a:r>
+          </a:p>
+          <a:p>
+            <a:pPr>
+              <a:spcAft>
+                <a:spcPts val="600"/>
+              </a:spcAft>
+            </a:pPr>
+            <a:r>
+              <a:rPr sz="1500">
+                <a:solidFill>
+                  <a:srgbClr val="22282E"/>
+                </a:solidFill>
+              </a:rPr>
+              <a:t>•  Las categorías conocidas de evasión intentan cambiar el contenido, el host, la disponibilidad de la interfaz o el resultado que recibe el proceso. Un parche en memoria afecta a ese proceso y versión…</a:t>
+            </a:r>
+          </a:p>
+          <a:p>
+            <a:pPr>
+              <a:spcAft>
+                <a:spcPts val="600"/>
+              </a:spcAft>
+            </a:pPr>
+            <a:r>
+              <a:rPr sz="1500">
+                <a:solidFill>
+                  <a:srgbClr val="22282E"/>
+                </a:solidFill>
+              </a:rPr>
+              <a:t>•  Por seguridad, el ejercicio debe usar una cadena inocua de prueba y centrarse en observar el flujo. No se necesita ejecutar malware real para demostrar que una transformación cambia el punto donde…</a:t>
+            </a:r>
+          </a:p>
+          <a:p>
+            <a:pPr>
+              <a:spcAft>
+                <a:spcPts val="600"/>
+              </a:spcAft>
+            </a:pPr>
+            <a:r>
+              <a:rPr sz="1500">
+                <a:solidFill>
+                  <a:srgbClr val="22282E"/>
+                </a:solidFill>
+              </a:rPr>
+              <a:t>•  AMSI no sustituye el registro de bloques de script, el control de aplicaciones, la reducción de superficie de ataque ni la telemetría del endpoint. Si una prueba demuestra que una interfaz puede…</a:t>
             </a:r>
           </a:p>
         </p:txBody>
@@ -4241,7 +4617,7 @@
                   <a:srgbClr val="0B3D2E"/>
                 </a:solidFill>
               </a:rPr>
-              <a:t>🧰 Herramientas y preparación</a:t>
+              <a:t>📖 Definiciones y características</a:t>
             </a:r>
           </a:p>
         </p:txBody>
@@ -4279,52 +4655,82 @@
                   <a:srgbClr val="22282E"/>
                 </a:solidFill>
               </a:rPr>
-              <a:t>•  Windows con PowerShell 5+ y Microsoft Defender activo (en VM de laboratorio).</a:t>
-            </a:r>
-          </a:p>
-          <a:p>
-            <a:pPr>
-              <a:spcAft>
-                <a:spcPts val="600"/>
-              </a:spcAft>
-            </a:pPr>
-            <a:r>
-              <a:rPr sz="1500">
-                <a:solidFill>
-                  <a:srgbClr val="22282E"/>
-                </a:solidFill>
-              </a:rPr>
-              <a:t>•  Herramientas de ofuscación de estudio (Invoke-Obfuscation como referencia histórica) y editores de scripts.</a:t>
-            </a:r>
-          </a:p>
-          <a:p>
-            <a:pPr>
-              <a:spcAft>
-                <a:spcPts val="600"/>
-              </a:spcAft>
-            </a:pPr>
-            <a:r>
-              <a:rPr sz="1500">
-                <a:solidFill>
-                  <a:srgbClr val="22282E"/>
-                </a:solidFill>
-              </a:rPr>
-              <a:t>•  Sysmon + Script Block Logging (Parte 8) para observar la detección.</a:t>
-            </a:r>
-          </a:p>
-          <a:p>
-            <a:pPr>
-              <a:spcAft>
-                <a:spcPts val="600"/>
-              </a:spcAft>
-            </a:pPr>
-            <a:r>
-              <a:rPr sz="1500">
-                <a:solidFill>
-                  <a:srgbClr val="22282E"/>
-                </a:solidFill>
-              </a:rPr>
-              <a:t>•  El C2 previo para probar la entrega de scripts evadidos.</a:t>
+              <a:t>•  AMSI: interfaz de Windows que permite a aplicaciones integrar proveedores antimalware y enviar contenido o flujos para análisis. Característica: el contenido disponible depende del host y del momento…</a:t>
+            </a:r>
+          </a:p>
+          <a:p>
+            <a:pPr>
+              <a:spcAft>
+                <a:spcPts val="600"/>
+              </a:spcAft>
+            </a:pPr>
+            <a:r>
+              <a:rPr sz="1500">
+                <a:solidFill>
+                  <a:srgbClr val="22282E"/>
+                </a:solidFill>
+              </a:rPr>
+              <a:t>•  Ofuscación: transformar el código para romper firmas manteniendo la funcionalidad. Característica: derrota firmas, no comportamiento.</a:t>
+            </a:r>
+          </a:p>
+          <a:p>
+            <a:pPr>
+              <a:spcAft>
+                <a:spcPts val="600"/>
+              </a:spcAft>
+            </a:pPr>
+            <a:r>
+              <a:rPr sz="1500">
+                <a:solidFill>
+                  <a:srgbClr val="22282E"/>
+                </a:solidFill>
+              </a:rPr>
+              <a:t>•  AMSI bypass por alteración en memoria: intento de modificar dentro de un proceso la ruta o el resultado del análisis. Característica: depende de versión e integración y puede generar señales de…</a:t>
+            </a:r>
+          </a:p>
+          <a:p>
+            <a:pPr>
+              <a:spcAft>
+                <a:spcPts val="600"/>
+              </a:spcAft>
+            </a:pPr>
+            <a:r>
+              <a:rPr sz="1500">
+                <a:solidFill>
+                  <a:srgbClr val="22282E"/>
+                </a:solidFill>
+              </a:rPr>
+              <a:t>•  Downgrade: forzar el uso de PowerShell v2 (sin AMSI). Característica: evita AMSI si la v2 está disponible.</a:t>
+            </a:r>
+          </a:p>
+          <a:p>
+            <a:pPr>
+              <a:spcAft>
+                <a:spcPts val="600"/>
+              </a:spcAft>
+            </a:pPr>
+            <a:r>
+              <a:rPr sz="1500">
+                <a:solidFill>
+                  <a:srgbClr val="22282E"/>
+                </a:solidFill>
+              </a:rPr>
+              <a:t>•  Provider tampering: manipular el proveedor de AMSI registrado. Característica: técnica más sigilosa pero compleja.</a:t>
+            </a:r>
+          </a:p>
+          <a:p>
+            <a:pPr>
+              <a:spcAft>
+                <a:spcPts val="600"/>
+              </a:spcAft>
+            </a:pPr>
+            <a:r>
+              <a:rPr sz="1500">
+                <a:solidFill>
+                  <a:srgbClr val="22282E"/>
+                </a:solidFill>
+              </a:rPr>
+              <a:t>•  String obfuscation / encoding: dividir y codificar cadenas sospechosas. Característica: primer nivel de evasión estática.</a:t>
             </a:r>
           </a:p>
         </p:txBody>
@@ -4375,7 +4781,7 @@
                   <a:srgbClr val="0B3D2E"/>
                 </a:solidFill>
               </a:rPr>
-              <a:t>🧪 Laboratorio guiado</a:t>
+              <a:t>📔 Glosario</a:t>
             </a:r>
           </a:p>
         </p:txBody>
@@ -4413,97 +4819,97 @@
                   <a:srgbClr val="22282E"/>
                 </a:solidFill>
               </a:rPr>
-              <a:t>•  Provoca una detección. En PowerShell del lab, ejecuta una cadena claramente maliciosa conocida (ej. la firma de prueba de AMSI) y observa que Defender la bloquea.</a:t>
-            </a:r>
-          </a:p>
-          <a:p>
-            <a:pPr>
-              <a:spcAft>
-                <a:spcPts val="600"/>
-              </a:spcAft>
-            </a:pPr>
-            <a:r>
-              <a:rPr sz="1500">
-                <a:solidFill>
-                  <a:srgbClr val="22282E"/>
-                </a:solidFill>
-              </a:rPr>
-              <a:t>•  Entiende dónde escanea AMSI. Comprueba que la detección ocurre en memoria al ejecutar, no al guardar el archivo: AMSI ve el contenido tras la desofuscación superficial.</a:t>
-            </a:r>
-          </a:p>
-          <a:p>
-            <a:pPr>
-              <a:spcAft>
-                <a:spcPts val="600"/>
-              </a:spcAft>
-            </a:pPr>
-            <a:r>
-              <a:rPr sz="1500">
-                <a:solidFill>
-                  <a:srgbClr val="22282E"/>
-                </a:solidFill>
-              </a:rPr>
-              <a:t>•  Ofuscación básica. Divide y concatena las cadenas sospechosas; observa si la firma estática deja de coincidir y por qué AMSI puede seguir viéndolo en runtime.</a:t>
-            </a:r>
-          </a:p>
-          <a:p>
-            <a:pPr>
-              <a:spcAft>
-                <a:spcPts val="600"/>
-              </a:spcAft>
-            </a:pPr>
-            <a:r>
-              <a:rPr sz="1500">
-                <a:solidFill>
-                  <a:srgbClr val="22282E"/>
-                </a:solidFill>
-              </a:rPr>
-              <a:t>•  Estudia el memory patch. Analiza conceptualmente cómo un bypass parchea el retorno de AmsiScanBuffer; ejecútalo en el lab y verifica que un script antes bloqueado ahora corre.</a:t>
-            </a:r>
-          </a:p>
-          <a:p>
-            <a:pPr>
-              <a:spcAft>
-                <a:spcPts val="600"/>
-              </a:spcAft>
-            </a:pPr>
-            <a:r>
-              <a:rPr sz="1500">
-                <a:solidFill>
-                  <a:srgbClr val="22282E"/>
-                </a:solidFill>
-              </a:rPr>
-              <a:t>•  Downgrade (si aplica). Prueba invocar powershell -version 2 en un sistema que lo permita y comprueba la ausencia de AMSI (documenta que en sistemas endurecidos v2 no está).</a:t>
-            </a:r>
-          </a:p>
-          <a:p>
-            <a:pPr>
-              <a:spcAft>
-                <a:spcPts val="600"/>
-              </a:spcAft>
-            </a:pPr>
-            <a:r>
-              <a:rPr sz="1500">
-                <a:solidFill>
-                  <a:srgbClr val="22282E"/>
-                </a:solidFill>
-              </a:rPr>
-              <a:t>•  Observa la detección. Con Script Block Logging activo, revisa cómo el Blue Team ve el bypass (patrones de reflexión, [Ref].Assembly, strings característicos).</a:t>
-            </a:r>
-          </a:p>
-          <a:p>
-            <a:pPr>
-              <a:spcAft>
-                <a:spcPts val="600"/>
-              </a:spcAft>
-            </a:pPr>
-            <a:r>
-              <a:rPr sz="1500">
-                <a:solidFill>
-                  <a:srgbClr val="22282E"/>
-                </a:solidFill>
-              </a:rPr>
-              <a:t>•  Ofuscación de binarios. Compara cómo un packer/cifrado cambia el hash del payload C2 sin cambiar su comportamiento, y por qué el EDR aún lo detecta.</a:t>
+              <a:t>•  AMSI: interfaz estándar de Windows que conecta aplicaciones con proveedores antimalware.</a:t>
+            </a:r>
+          </a:p>
+          <a:p>
+            <a:pPr>
+              <a:spcAft>
+                <a:spcPts val="600"/>
+              </a:spcAft>
+            </a:pPr>
+            <a:r>
+              <a:rPr sz="1500">
+                <a:solidFill>
+                  <a:srgbClr val="22282E"/>
+                </a:solidFill>
+              </a:rPr>
+              <a:t>•  Host de script: aplicación responsable de interpretar o ejecutar el contenido, como PowerShell o Windows Script Host.</a:t>
+            </a:r>
+          </a:p>
+          <a:p>
+            <a:pPr>
+              <a:spcAft>
+                <a:spcPts val="600"/>
+              </a:spcAft>
+            </a:pPr>
+            <a:r>
+              <a:rPr sz="1500">
+                <a:solidFill>
+                  <a:srgbClr val="22282E"/>
+                </a:solidFill>
+              </a:rPr>
+              <a:t>•  Proveedor AMSI: componente antimalware que analiza el contenido recibido mediante la interfaz.</a:t>
+            </a:r>
+          </a:p>
+          <a:p>
+            <a:pPr>
+              <a:spcAft>
+                <a:spcPts val="600"/>
+              </a:spcAft>
+            </a:pPr>
+            <a:r>
+              <a:rPr sz="1500">
+                <a:solidFill>
+                  <a:srgbClr val="22282E"/>
+                </a:solidFill>
+              </a:rPr>
+              <a:t>•  Sesión AMSI: contexto que permite correlacionar varias solicitudes de análisis relacionadas.</a:t>
+            </a:r>
+          </a:p>
+          <a:p>
+            <a:pPr>
+              <a:spcAft>
+                <a:spcPts val="600"/>
+              </a:spcAft>
+            </a:pPr>
+            <a:r>
+              <a:rPr sz="1500">
+                <a:solidFill>
+                  <a:srgbClr val="22282E"/>
+                </a:solidFill>
+              </a:rPr>
+              <a:t>•  Codificación: cambio reversible de representación; no garantiza confidencialidad.</a:t>
+            </a:r>
+          </a:p>
+          <a:p>
+            <a:pPr>
+              <a:spcAft>
+                <a:spcPts val="600"/>
+              </a:spcAft>
+            </a:pPr>
+            <a:r>
+              <a:rPr sz="1500">
+                <a:solidFill>
+                  <a:srgbClr val="22282E"/>
+                </a:solidFill>
+              </a:rPr>
+              <a:t>•  Cifrado: transformación criptográfica destinada a proteger información mediante una clave.</a:t>
+            </a:r>
+          </a:p>
+          <a:p>
+            <a:pPr>
+              <a:spcAft>
+                <a:spcPts val="600"/>
+              </a:spcAft>
+            </a:pPr>
+            <a:r>
+              <a:rPr sz="1500">
+                <a:solidFill>
+                  <a:srgbClr val="22282E"/>
+                </a:solidFill>
+              </a:rPr>
+              <a:t>•  Ofuscación: transformación que dificulta la comprensión manteniendo el comportamiento.</a:t>
             </a:r>
           </a:p>
         </p:txBody>
@@ -4554,7 +4960,7 @@
                   <a:srgbClr val="0B3D2E"/>
                 </a:solidFill>
               </a:rPr>
-              <a:t>✍️ Ejercicios</a:t>
+              <a:t>🧰 Herramientas y preparación</a:t>
             </a:r>
           </a:p>
         </p:txBody>
@@ -4592,82 +4998,52 @@
                   <a:srgbClr val="22282E"/>
                 </a:solidFill>
               </a:rPr>
-              <a:t>•  Explica con tus palabras qué ventaja tiene AMSI sobre el escaneo de archivos en disco.</a:t>
-            </a:r>
-          </a:p>
-          <a:p>
-            <a:pPr>
-              <a:spcAft>
-                <a:spcPts val="600"/>
-              </a:spcAft>
-            </a:pPr>
-            <a:r>
-              <a:rPr sz="1500">
-                <a:solidFill>
-                  <a:srgbClr val="22282E"/>
-                </a:solidFill>
-              </a:rPr>
-              <a:t>•  Ofusca un script de prueba y evalúa si evade la firma estática.</a:t>
-            </a:r>
-          </a:p>
-          <a:p>
-            <a:pPr>
-              <a:spcAft>
-                <a:spcPts val="600"/>
-              </a:spcAft>
-            </a:pPr>
-            <a:r>
-              <a:rPr sz="1500">
-                <a:solidFill>
-                  <a:srgbClr val="22282E"/>
-                </a:solidFill>
-              </a:rPr>
-              <a:t>•  Describe paso a paso la lógica de un AMSI memory patch.</a:t>
-            </a:r>
-          </a:p>
-          <a:p>
-            <a:pPr>
-              <a:spcAft>
-                <a:spcPts val="600"/>
-              </a:spcAft>
-            </a:pPr>
-            <a:r>
-              <a:rPr sz="1500">
-                <a:solidFill>
-                  <a:srgbClr val="22282E"/>
-                </a:solidFill>
-              </a:rPr>
-              <a:t>•  Explica por qué el downgrade a PS v2 evade AMSI y cómo mitigarlo.</a:t>
-            </a:r>
-          </a:p>
-          <a:p>
-            <a:pPr>
-              <a:spcAft>
-                <a:spcPts val="600"/>
-              </a:spcAft>
-            </a:pPr>
-            <a:r>
-              <a:rPr sz="1500">
-                <a:solidFill>
-                  <a:srgbClr val="22282E"/>
-                </a:solidFill>
-              </a:rPr>
-              <a:t>•  Enumera 4 IOCs que deja un intento de bypass en los logs.</a:t>
-            </a:r>
-          </a:p>
-          <a:p>
-            <a:pPr>
-              <a:spcAft>
-                <a:spcPts val="600"/>
-              </a:spcAft>
-            </a:pPr>
-            <a:r>
-              <a:rPr sz="1500">
-                <a:solidFill>
-                  <a:srgbClr val="22282E"/>
-                </a:solidFill>
-              </a:rPr>
-              <a:t>•  Investiga por qué los bypass públicos "caducan" rápido.</a:t>
+              <a:t>•  Windows con PowerShell 5+ y Microsoft Defender activo (en VM de laboratorio).</a:t>
+            </a:r>
+          </a:p>
+          <a:p>
+            <a:pPr>
+              <a:spcAft>
+                <a:spcPts val="600"/>
+              </a:spcAft>
+            </a:pPr>
+            <a:r>
+              <a:rPr sz="1500">
+                <a:solidFill>
+                  <a:srgbClr val="22282E"/>
+                </a:solidFill>
+              </a:rPr>
+              <a:t>•  Herramientas de ofuscación de estudio (Invoke-Obfuscation como referencia histórica) y editores de scripts.</a:t>
+            </a:r>
+          </a:p>
+          <a:p>
+            <a:pPr>
+              <a:spcAft>
+                <a:spcPts val="600"/>
+              </a:spcAft>
+            </a:pPr>
+            <a:r>
+              <a:rPr sz="1500">
+                <a:solidFill>
+                  <a:srgbClr val="22282E"/>
+                </a:solidFill>
+              </a:rPr>
+              <a:t>•  Sysmon + Script Block Logging (Parte 8) para observar la detección.</a:t>
+            </a:r>
+          </a:p>
+          <a:p>
+            <a:pPr>
+              <a:spcAft>
+                <a:spcPts val="600"/>
+              </a:spcAft>
+            </a:pPr>
+            <a:r>
+              <a:rPr sz="1500">
+                <a:solidFill>
+                  <a:srgbClr val="22282E"/>
+                </a:solidFill>
+              </a:rPr>
+              <a:t>•  El C2 previo para probar la entrega de scripts evadidos.</a:t>
             </a:r>
           </a:p>
         </p:txBody>
@@ -4718,7 +5094,7 @@
                   <a:srgbClr val="0B3D2E"/>
                 </a:solidFill>
               </a:rPr>
-              <a:t>📝 Reto verificable</a:t>
+              <a:t>🧪 Laboratorio guiado</a:t>
             </a:r>
           </a:p>
         </p:txBody>
@@ -4756,22 +5132,97 @@
                   <a:srgbClr val="22282E"/>
                 </a:solidFill>
               </a:rPr>
-              <a:t>•  En tu laboratorio, toma un script que Defender bloquea y consigue ejecutarlo aplicando una técnica de bypass de AMSI, documentando cómo el Blue Team lo detectaría.</a:t>
-            </a:r>
-          </a:p>
-          <a:p>
-            <a:pPr>
-              <a:spcAft>
-                <a:spcPts val="600"/>
-              </a:spcAft>
-            </a:pPr>
-            <a:r>
-              <a:rPr sz="1500">
-                <a:solidFill>
-                  <a:srgbClr val="22282E"/>
-                </a:solidFill>
-              </a:rPr>
-              <a:t>•  Criterio de aceptación: demuestras la ejecución del script tras el bypass (antes bloqueado) y entregas una regla o lista de indicadores (Script Block Logging, cadenas, comportamiento) con la que un defensor detectaría tu técnica. Todo en tu VM.</a:t>
+              <a:t>•  Provoca una detección. En PowerShell del lab, ejecuta una cadena claramente maliciosa conocida (ej. la firma de prueba de AMSI) y observa que Defender la bloquea.</a:t>
+            </a:r>
+          </a:p>
+          <a:p>
+            <a:pPr>
+              <a:spcAft>
+                <a:spcPts val="600"/>
+              </a:spcAft>
+            </a:pPr>
+            <a:r>
+              <a:rPr sz="1500">
+                <a:solidFill>
+                  <a:srgbClr val="22282E"/>
+                </a:solidFill>
+              </a:rPr>
+              <a:t>•  Entiende dónde escanea AMSI. Comprueba que la detección ocurre en memoria al ejecutar, no al guardar el archivo: AMSI ve el contenido tras la desofuscación superficial.</a:t>
+            </a:r>
+          </a:p>
+          <a:p>
+            <a:pPr>
+              <a:spcAft>
+                <a:spcPts val="600"/>
+              </a:spcAft>
+            </a:pPr>
+            <a:r>
+              <a:rPr sz="1500">
+                <a:solidFill>
+                  <a:srgbClr val="22282E"/>
+                </a:solidFill>
+              </a:rPr>
+              <a:t>•  Ofuscación básica. Divide y concatena las cadenas sospechosas; observa si la firma estática deja de coincidir y por qué AMSI puede seguir viéndolo en runtime.</a:t>
+            </a:r>
+          </a:p>
+          <a:p>
+            <a:pPr>
+              <a:spcAft>
+                <a:spcPts val="600"/>
+              </a:spcAft>
+            </a:pPr>
+            <a:r>
+              <a:rPr sz="1500">
+                <a:solidFill>
+                  <a:srgbClr val="22282E"/>
+                </a:solidFill>
+              </a:rPr>
+              <a:t>•  Estudia el memory patch sin una carga real. Analiza conceptualmente cómo una alteración en proceso intenta cambiar el flujo de análisis. Usa una cadena inocua de prueba y compara eventos; no…</a:t>
+            </a:r>
+          </a:p>
+          <a:p>
+            <a:pPr>
+              <a:spcAft>
+                <a:spcPts val="600"/>
+              </a:spcAft>
+            </a:pPr>
+            <a:r>
+              <a:rPr sz="1500">
+                <a:solidFill>
+                  <a:srgbClr val="22282E"/>
+                </a:solidFill>
+              </a:rPr>
+              <a:t>•  Downgrade (si aplica). Prueba invocar powershell -version 2 en un sistema que lo permita y comprueba la ausencia de AMSI (documenta que en sistemas endurecidos v2 no está).</a:t>
+            </a:r>
+          </a:p>
+          <a:p>
+            <a:pPr>
+              <a:spcAft>
+                <a:spcPts val="600"/>
+              </a:spcAft>
+            </a:pPr>
+            <a:r>
+              <a:rPr sz="1500">
+                <a:solidFill>
+                  <a:srgbClr val="22282E"/>
+                </a:solidFill>
+              </a:rPr>
+              <a:t>•  Observa la detección. Con Script Block Logging activo, revisa cómo el Blue Team ve el bypass (patrones de reflexión, [Ref].Assembly, strings característicos).</a:t>
+            </a:r>
+          </a:p>
+          <a:p>
+            <a:pPr>
+              <a:spcAft>
+                <a:spcPts val="600"/>
+              </a:spcAft>
+            </a:pPr>
+            <a:r>
+              <a:rPr sz="1500">
+                <a:solidFill>
+                  <a:srgbClr val="22282E"/>
+                </a:solidFill>
+              </a:rPr>
+              <a:t>•  Ofuscación de binarios. Compara cómo un packer/cifrado cambia el hash del payload C2 sin cambiar su comportamiento, y por qué el EDR aún lo detecta.</a:t>
             </a:r>
           </a:p>
         </p:txBody>
